--- a/Mini Project - JPEG Compression/Mini_Project_PPT.pptx
+++ b/Mini Project - JPEG Compression/Mini_Project_PPT.pptx
@@ -859,7 +859,7 @@
         </p:nvSpPr>
         <p:spPr>
           <a:xfrm>
-            <a:off x="381000" y="685800"/>
+            <a:off x="381300" y="685800"/>
             <a:ext cx="6096000" cy="3429000"/>
           </a:xfrm>
           <a:custGeom>
@@ -7365,7 +7365,7 @@
         </p:blipFill>
         <p:spPr>
           <a:xfrm>
-            <a:off x="6047750" y="1174777"/>
+            <a:off x="6047750" y="1152475"/>
             <a:ext cx="2501850" cy="2893800"/>
           </a:xfrm>
           <a:prstGeom prst="rect">
